--- a/docs/BaoCao_GK.pptx
+++ b/docs/BaoCao_GK.pptx
@@ -6286,7 +6286,7 @@
                 <a:ea typeface="Arial" pitchFamily="34" charset="-122"/>
                 <a:cs typeface="Arial" pitchFamily="34" charset="-120"/>
               </a:rPr>
-              <a:t>(Điền URL sau khi upload — bắt buộc nếu đề bài yêu cầu)</a:t>
+              <a:t>https://youtu.be/3nTMk1xiUGs</a:t>
             </a:r>
             <a:endParaRPr lang="en-US" sz="1300" dirty="0"/>
           </a:p>
